--- a/Lessons/Lesson A3-6 - Database Types & Data Warehouses [HL ONLY].pptx
+++ b/Lessons/Lesson A3-6 - Database Types & Data Warehouses [HL ONLY].pptx
@@ -155,7 +155,7 @@
   <pc:docChgLst>
     <pc:chgData name="Michael Hill" userId="41dba03d-e58d-4389-9894-554c10310ba4" providerId="ADAL" clId="{EF23FE1D-A042-481E-AFD7-2A9FB0847F54}"/>
     <pc:docChg chg="undo redo custSel addSld delSld modSld sldOrd">
-      <pc:chgData name="Michael Hill" userId="41dba03d-e58d-4389-9894-554c10310ba4" providerId="ADAL" clId="{EF23FE1D-A042-481E-AFD7-2A9FB0847F54}" dt="2025-12-08T15:43:44.552" v="9685" actId="404"/>
+      <pc:chgData name="Michael Hill" userId="41dba03d-e58d-4389-9894-554c10310ba4" providerId="ADAL" clId="{EF23FE1D-A042-481E-AFD7-2A9FB0847F54}" dt="2025-12-08T18:56:29.061" v="9699" actId="20577"/>
       <pc:docMkLst>
         <pc:docMk/>
       </pc:docMkLst>
@@ -749,13 +749,13 @@
         </pc:spChg>
       </pc:sldChg>
       <pc:sldChg chg="modSp add mod">
-        <pc:chgData name="Michael Hill" userId="41dba03d-e58d-4389-9894-554c10310ba4" providerId="ADAL" clId="{EF23FE1D-A042-481E-AFD7-2A9FB0847F54}" dt="2025-12-08T15:43:44.552" v="9685" actId="404"/>
+        <pc:chgData name="Michael Hill" userId="41dba03d-e58d-4389-9894-554c10310ba4" providerId="ADAL" clId="{EF23FE1D-A042-481E-AFD7-2A9FB0847F54}" dt="2025-12-08T18:56:29.061" v="9699" actId="20577"/>
         <pc:sldMkLst>
           <pc:docMk/>
           <pc:sldMk cId="4175736536" sldId="505"/>
         </pc:sldMkLst>
         <pc:spChg chg="mod">
-          <ac:chgData name="Michael Hill" userId="41dba03d-e58d-4389-9894-554c10310ba4" providerId="ADAL" clId="{EF23FE1D-A042-481E-AFD7-2A9FB0847F54}" dt="2025-12-08T15:43:44.552" v="9685" actId="404"/>
+          <ac:chgData name="Michael Hill" userId="41dba03d-e58d-4389-9894-554c10310ba4" providerId="ADAL" clId="{EF23FE1D-A042-481E-AFD7-2A9FB0847F54}" dt="2025-12-08T18:56:29.061" v="9699" actId="20577"/>
           <ac:spMkLst>
             <pc:docMk/>
             <pc:sldMk cId="4175736536" sldId="505"/>
@@ -15731,7 +15731,25 @@
                 </a:solidFill>
                 <a:latin typeface="Bahnschrift" panose="020B0502040204020203" pitchFamily="34" charset="0"/>
               </a:rPr>
-              <a:t>At least three sentences each</a:t>
+              <a:t>At </a:t>
+            </a:r>
+            <a:r>
+              <a:rPr lang="en-US" sz="2400">
+                <a:solidFill>
+                  <a:schemeClr val="bg1"/>
+                </a:solidFill>
+                <a:latin typeface="Bahnschrift" panose="020B0502040204020203" pitchFamily="34" charset="0"/>
+              </a:rPr>
+              <a:t>least three </a:t>
+            </a:r>
+            <a:r>
+              <a:rPr lang="en-US" sz="2400" dirty="0">
+                <a:solidFill>
+                  <a:schemeClr val="bg1"/>
+                </a:solidFill>
+                <a:latin typeface="Bahnschrift" panose="020B0502040204020203" pitchFamily="34" charset="0"/>
+              </a:rPr>
+              <a:t>sentences each</a:t>
             </a:r>
           </a:p>
           <a:p>
